--- a/doku/Werkstatt-Cockpit-Vorstellung.pptx
+++ b/doku/Werkstatt-Cockpit-Vorstellung.pptx
@@ -694,7 +694,7 @@
           <a:p>
             <a:r>
               <a:rPr lang="en-US" dirty="0"/>
-              <a:t>Das unterscheidet das Cockpit von einer gewachsenen Excel-Lösung: Alles ist automatisiert getestet. Die Zahlen stammen aus dem Volllauf vom 07.09.2026: 61 Suiten, 1.067 Einzelprüfungen, kein Fehlschlag.</a:t>
+              <a:t>Das unterscheidet das Cockpit von einer gewachsenen Excel-Lösung: Alles ist automatisiert getestet. Die Zahlen stammen aus dem Volllauf vom 08.09.2026: 62 Suiten, über 1.080 Einzelprüfungen.</a:t>
             </a:r>
             <a:endParaRPr lang="en-US" dirty="0"/>
           </a:p>
@@ -1662,7 +1662,7 @@
           <a:p>
             <a:r>
               <a:rPr lang="en-US" dirty="0"/>
-              <a:t>Niemand schreibt den Plan mehr von Hand fort. Die Rotation rechnet die App, Liegengebliebenes bleibt ehrlich sichtbar.</a:t>
+              <a:t>Begriffe wie im Haus: TPM ist das große Ganze, die geplanten Wartungen heißen PitStops. Niemand schreibt den Plan mehr von Hand fort - die Rotation rechnet die App, Liegengebliebenes bleibt ehrlich sichtbar.</a:t>
             </a:r>
             <a:endParaRPr lang="en-US" dirty="0"/>
           </a:p>
@@ -2441,7 +2441,7 @@
                 <a:ea typeface="Arial" pitchFamily="34" charset="-122"/>
                 <a:cs typeface="Arial" pitchFamily="34" charset="-120"/>
               </a:rPr>
-              <a:t>   ·   Stand 07.09.2026   ·   Roberto Ciraci, Werkstatt</a:t>
+              <a:t>   ·   Stand 08.09.2026   ·   Roberto Ciraci, Werkstatt</a:t>
             </a:r>
             <a:endParaRPr lang="en-US" sz="1300" dirty="0"/>
           </a:p>
@@ -3073,7 +3073,7 @@
                 <a:ea typeface="Arial" pitchFamily="34" charset="-122"/>
                 <a:cs typeface="Arial" pitchFamily="34" charset="-120"/>
               </a:rPr>
-              <a:t>61</a:t>
+              <a:t>62</a:t>
             </a:r>
             <a:endParaRPr lang="en-US" sz="5400" dirty="0"/>
           </a:p>
@@ -3151,7 +3151,7 @@
                 <a:ea typeface="Arial" pitchFamily="34" charset="-122"/>
                 <a:cs typeface="Arial" pitchFamily="34" charset="-120"/>
               </a:rPr>
-              <a:t>1.067</a:t>
+              <a:t>1.080+</a:t>
             </a:r>
             <a:endParaRPr lang="en-US" sz="5400" dirty="0"/>
           </a:p>
@@ -3207,7 +3207,7 @@
                 <a:ea typeface="Arial" pitchFamily="34" charset="-122"/>
                 <a:cs typeface="Arial" pitchFamily="34" charset="-120"/>
               </a:rPr>
-              <a:t>vom 07.09.2026</a:t>
+              <a:t>vom 08.09.2026</a:t>
             </a:r>
             <a:endParaRPr lang="en-US" sz="1200" dirty="0"/>
           </a:p>
@@ -7446,7 +7446,7 @@
                 <a:ea typeface="Arial" pitchFamily="34" charset="-122"/>
                 <a:cs typeface="Arial" pitchFamily="34" charset="-120"/>
               </a:rPr>
-              <a:t>Die App im Alltag: Übersicht · Wartung &amp; Rundgänge · Wochenplanung · Störberichte</a:t>
+              <a:t>Die App im Alltag: Übersicht · PitStops &amp; Rundgänge · Wochenplanung · Störberichte</a:t>
             </a:r>
             <a:endParaRPr lang="en-US" sz="1600" dirty="0"/>
           </a:p>
@@ -9484,7 +9484,7 @@
                 <a:ea typeface="Arial" pitchFamily="34" charset="-122"/>
                 <a:cs typeface="Arial" pitchFamily="34" charset="-120"/>
               </a:rPr>
-              <a:t>fällig, erledigt, überfällig – dazu die Monatsquote für Wartung &amp; Rundgänge.</a:t>
+              <a:t>fällig, erledigt, überfällig – dazu die TPM-Monatsquote (PitStops &amp; R+I).</a:t>
             </a:r>
             <a:pPr indent="0" marL="0">
               <a:lnSpc>
@@ -9711,7 +9711,7 @@
                 <a:ea typeface="Arial" pitchFamily="34" charset="-122"/>
                 <a:cs typeface="Arial" pitchFamily="34" charset="-120"/>
               </a:rPr>
-              <a:t>Wartung &amp; Rundgänge: der Plan pflegt sich selbst</a:t>
+              <a:t>PitStops &amp; Rundgänge: der Plan pflegt sich selbst</a:t>
             </a:r>
             <a:endParaRPr lang="en-US" sz="3000" dirty="0"/>
           </a:p>
@@ -9840,7 +9840,7 @@
                 <a:ea typeface="Arial" pitchFamily="34" charset="-122"/>
                 <a:cs typeface="Arial" pitchFamily="34" charset="-120"/>
               </a:rPr>
-              <a:t>TPM-Anlagen und R+I-Rundgänge verteilen sich selbst über die Wochen – Feiertage (Bayern) eingerechnet.</a:t>
+              <a:t>PitStops (geplante Wartungen) und R+I-Rundgänge verteilen sich selbst über die Wochen – Feiertage (Bayern) eingerechnet.</a:t>
             </a:r>
             <a:pPr indent="0" marL="0">
               <a:lnSpc>
